--- a/image.pptx
+++ b/image.pptx
@@ -197,7 +197,7 @@
           <a:p>
             <a:fld id="{5C2E8DB0-C376-4416-BC3A-D5EF57CCCD5F}" type="datetimeFigureOut">
               <a:rPr lang="zh-CN" altLang="en-US" smtClean="0"/>
-              <a:t>2026/1/9</a:t>
+              <a:t>2026/1/18</a:t>
             </a:fld>
             <a:endParaRPr lang="zh-CN" altLang="en-US"/>
           </a:p>
@@ -695,7 +695,7 @@
           <a:p>
             <a:fld id="{E0AF840B-1C83-482B-B7FF-88DEF8DF3EF4}" type="datetimeFigureOut">
               <a:rPr lang="zh-CN" altLang="en-US" smtClean="0"/>
-              <a:t>2026/1/9</a:t>
+              <a:t>2026/1/18</a:t>
             </a:fld>
             <a:endParaRPr lang="zh-CN" altLang="en-US"/>
           </a:p>
@@ -893,7 +893,7 @@
           <a:p>
             <a:fld id="{E0AF840B-1C83-482B-B7FF-88DEF8DF3EF4}" type="datetimeFigureOut">
               <a:rPr lang="zh-CN" altLang="en-US" smtClean="0"/>
-              <a:t>2026/1/9</a:t>
+              <a:t>2026/1/18</a:t>
             </a:fld>
             <a:endParaRPr lang="zh-CN" altLang="en-US"/>
           </a:p>
@@ -1101,7 +1101,7 @@
           <a:p>
             <a:fld id="{E0AF840B-1C83-482B-B7FF-88DEF8DF3EF4}" type="datetimeFigureOut">
               <a:rPr lang="zh-CN" altLang="en-US" smtClean="0"/>
-              <a:t>2026/1/9</a:t>
+              <a:t>2026/1/18</a:t>
             </a:fld>
             <a:endParaRPr lang="zh-CN" altLang="en-US"/>
           </a:p>
@@ -1299,7 +1299,7 @@
           <a:p>
             <a:fld id="{E0AF840B-1C83-482B-B7FF-88DEF8DF3EF4}" type="datetimeFigureOut">
               <a:rPr lang="zh-CN" altLang="en-US" smtClean="0"/>
-              <a:t>2026/1/9</a:t>
+              <a:t>2026/1/18</a:t>
             </a:fld>
             <a:endParaRPr lang="zh-CN" altLang="en-US"/>
           </a:p>
@@ -1574,7 +1574,7 @@
           <a:p>
             <a:fld id="{E0AF840B-1C83-482B-B7FF-88DEF8DF3EF4}" type="datetimeFigureOut">
               <a:rPr lang="zh-CN" altLang="en-US" smtClean="0"/>
-              <a:t>2026/1/9</a:t>
+              <a:t>2026/1/18</a:t>
             </a:fld>
             <a:endParaRPr lang="zh-CN" altLang="en-US"/>
           </a:p>
@@ -1839,7 +1839,7 @@
           <a:p>
             <a:fld id="{E0AF840B-1C83-482B-B7FF-88DEF8DF3EF4}" type="datetimeFigureOut">
               <a:rPr lang="zh-CN" altLang="en-US" smtClean="0"/>
-              <a:t>2026/1/9</a:t>
+              <a:t>2026/1/18</a:t>
             </a:fld>
             <a:endParaRPr lang="zh-CN" altLang="en-US"/>
           </a:p>
@@ -2251,7 +2251,7 @@
           <a:p>
             <a:fld id="{E0AF840B-1C83-482B-B7FF-88DEF8DF3EF4}" type="datetimeFigureOut">
               <a:rPr lang="zh-CN" altLang="en-US" smtClean="0"/>
-              <a:t>2026/1/9</a:t>
+              <a:t>2026/1/18</a:t>
             </a:fld>
             <a:endParaRPr lang="zh-CN" altLang="en-US"/>
           </a:p>
@@ -2392,7 +2392,7 @@
           <a:p>
             <a:fld id="{E0AF840B-1C83-482B-B7FF-88DEF8DF3EF4}" type="datetimeFigureOut">
               <a:rPr lang="zh-CN" altLang="en-US" smtClean="0"/>
-              <a:t>2026/1/9</a:t>
+              <a:t>2026/1/18</a:t>
             </a:fld>
             <a:endParaRPr lang="zh-CN" altLang="en-US"/>
           </a:p>
@@ -2505,7 +2505,7 @@
           <a:p>
             <a:fld id="{E0AF840B-1C83-482B-B7FF-88DEF8DF3EF4}" type="datetimeFigureOut">
               <a:rPr lang="zh-CN" altLang="en-US" smtClean="0"/>
-              <a:t>2026/1/9</a:t>
+              <a:t>2026/1/18</a:t>
             </a:fld>
             <a:endParaRPr lang="zh-CN" altLang="en-US"/>
           </a:p>
@@ -2816,7 +2816,7 @@
           <a:p>
             <a:fld id="{E0AF840B-1C83-482B-B7FF-88DEF8DF3EF4}" type="datetimeFigureOut">
               <a:rPr lang="zh-CN" altLang="en-US" smtClean="0"/>
-              <a:t>2026/1/9</a:t>
+              <a:t>2026/1/18</a:t>
             </a:fld>
             <a:endParaRPr lang="zh-CN" altLang="en-US"/>
           </a:p>
@@ -3104,7 +3104,7 @@
           <a:p>
             <a:fld id="{E0AF840B-1C83-482B-B7FF-88DEF8DF3EF4}" type="datetimeFigureOut">
               <a:rPr lang="zh-CN" altLang="en-US" smtClean="0"/>
-              <a:t>2026/1/9</a:t>
+              <a:t>2026/1/18</a:t>
             </a:fld>
             <a:endParaRPr lang="zh-CN" altLang="en-US"/>
           </a:p>
@@ -3345,7 +3345,7 @@
           <a:p>
             <a:fld id="{E0AF840B-1C83-482B-B7FF-88DEF8DF3EF4}" type="datetimeFigureOut">
               <a:rPr lang="zh-CN" altLang="en-US" smtClean="0"/>
-              <a:t>2026/1/9</a:t>
+              <a:t>2026/1/18</a:t>
             </a:fld>
             <a:endParaRPr lang="zh-CN" altLang="en-US"/>
           </a:p>
@@ -20596,8 +20596,8 @@
           </a:p>
         </p:txBody>
       </p:sp>
-      <mc:AlternateContent xmlns:mc="http://schemas.openxmlformats.org/markup-compatibility/2006">
-        <mc:Choice xmlns:a14="http://schemas.microsoft.com/office/drawing/2010/main" Requires="a14">
+      <mc:AlternateContent xmlns:mc="http://schemas.openxmlformats.org/markup-compatibility/2006" xmlns:a14="http://schemas.microsoft.com/office/drawing/2010/main">
+        <mc:Choice Requires="a14">
           <p:sp>
             <p:nvSpPr>
               <p:cNvPr id="129" name="文本框 128">
@@ -20653,7 +20653,7 @@
             </p:txBody>
           </p:sp>
         </mc:Choice>
-        <mc:Fallback>
+        <mc:Fallback xmlns="">
           <p:sp>
             <p:nvSpPr>
               <p:cNvPr id="129" name="文本框 128">
@@ -20753,8 +20753,8 @@
           </a:p>
         </p:txBody>
       </p:sp>
-      <mc:AlternateContent xmlns:mc="http://schemas.openxmlformats.org/markup-compatibility/2006">
-        <mc:Choice xmlns:a14="http://schemas.microsoft.com/office/drawing/2010/main" Requires="a14">
+      <mc:AlternateContent xmlns:mc="http://schemas.openxmlformats.org/markup-compatibility/2006" xmlns:a14="http://schemas.microsoft.com/office/drawing/2010/main">
+        <mc:Choice Requires="a14">
           <p:sp>
             <p:nvSpPr>
               <p:cNvPr id="133" name="文本框 132">
@@ -20875,7 +20875,7 @@
             </p:txBody>
           </p:sp>
         </mc:Choice>
-        <mc:Fallback>
+        <mc:Fallback xmlns="">
           <p:sp>
             <p:nvSpPr>
               <p:cNvPr id="133" name="文本框 132">
@@ -21009,7 +21009,7 @@
                 <a:latin typeface="Times New Roman" panose="02020603050405020304" pitchFamily="18" charset="0"/>
                 <a:cs typeface="Times New Roman" panose="02020603050405020304" pitchFamily="18" charset="0"/>
               </a:rPr>
-              <a:t>Learnable Graph Convolution Module</a:t>
+              <a:t>Learnable Graph Convolution</a:t>
             </a:r>
             <a:endParaRPr lang="zh-CN" altLang="en-US" sz="2000" b="1" dirty="0">
               <a:latin typeface="Times New Roman" panose="02020603050405020304" pitchFamily="18" charset="0"/>
@@ -23482,8 +23482,8 @@
           </a:fontRef>
         </p:style>
       </p:cxnSp>
-      <mc:AlternateContent xmlns:mc="http://schemas.openxmlformats.org/markup-compatibility/2006">
-        <mc:Choice xmlns:a14="http://schemas.microsoft.com/office/drawing/2010/main" Requires="a14">
+      <mc:AlternateContent xmlns:mc="http://schemas.openxmlformats.org/markup-compatibility/2006" xmlns:a14="http://schemas.microsoft.com/office/drawing/2010/main">
+        <mc:Choice Requires="a14">
           <p:sp>
             <p:nvSpPr>
               <p:cNvPr id="593" name="文本框 592">
@@ -23590,7 +23590,7 @@
             </p:txBody>
           </p:sp>
         </mc:Choice>
-        <mc:Fallback>
+        <mc:Fallback xmlns="">
           <p:sp>
             <p:nvSpPr>
               <p:cNvPr id="593" name="文本框 592">
@@ -23675,8 +23675,8 @@
           </a:p>
         </p:txBody>
       </p:sp>
-      <mc:AlternateContent xmlns:mc="http://schemas.openxmlformats.org/markup-compatibility/2006">
-        <mc:Choice xmlns:a14="http://schemas.microsoft.com/office/drawing/2010/main" Requires="a14">
+      <mc:AlternateContent xmlns:mc="http://schemas.openxmlformats.org/markup-compatibility/2006" xmlns:a14="http://schemas.microsoft.com/office/drawing/2010/main">
+        <mc:Choice Requires="a14">
           <p:sp>
             <p:nvSpPr>
               <p:cNvPr id="596" name="文本框 595">
@@ -23726,7 +23726,7 @@
             </p:txBody>
           </p:sp>
         </mc:Choice>
-        <mc:Fallback>
+        <mc:Fallback xmlns="">
           <p:sp>
             <p:nvSpPr>
               <p:cNvPr id="596" name="文本框 595">
@@ -25805,8 +25805,8 @@
           </a:p>
         </p:txBody>
       </p:sp>
-      <mc:AlternateContent xmlns:mc="http://schemas.openxmlformats.org/markup-compatibility/2006">
-        <mc:Choice xmlns:a14="http://schemas.microsoft.com/office/drawing/2010/main" Requires="a14">
+      <mc:AlternateContent xmlns:mc="http://schemas.openxmlformats.org/markup-compatibility/2006" xmlns:a14="http://schemas.microsoft.com/office/drawing/2010/main">
+        <mc:Choice Requires="a14">
           <p:sp>
             <p:nvSpPr>
               <p:cNvPr id="571" name="文本框 570">
@@ -25856,7 +25856,7 @@
             </p:txBody>
           </p:sp>
         </mc:Choice>
-        <mc:Fallback>
+        <mc:Fallback xmlns="">
           <p:sp>
             <p:nvSpPr>
               <p:cNvPr id="571" name="文本框 570">
@@ -25953,8 +25953,8 @@
           </a:p>
         </p:txBody>
       </p:sp>
-      <mc:AlternateContent xmlns:mc="http://schemas.openxmlformats.org/markup-compatibility/2006">
-        <mc:Choice xmlns:a14="http://schemas.microsoft.com/office/drawing/2010/main" Requires="a14">
+      <mc:AlternateContent xmlns:mc="http://schemas.openxmlformats.org/markup-compatibility/2006" xmlns:a14="http://schemas.microsoft.com/office/drawing/2010/main">
+        <mc:Choice Requires="a14">
           <p:sp>
             <p:nvSpPr>
               <p:cNvPr id="594" name="文本框 593">
@@ -26005,7 +26005,7 @@
             </p:txBody>
           </p:sp>
         </mc:Choice>
-        <mc:Fallback>
+        <mc:Fallback xmlns="">
           <p:sp>
             <p:nvSpPr>
               <p:cNvPr id="594" name="文本框 593">
@@ -30614,8 +30614,8 @@
           </p:style>
         </p:cxnSp>
       </p:grpSp>
-      <mc:AlternateContent xmlns:mc="http://schemas.openxmlformats.org/markup-compatibility/2006">
-        <mc:Choice xmlns:a14="http://schemas.microsoft.com/office/drawing/2010/main" Requires="a14">
+      <mc:AlternateContent xmlns:mc="http://schemas.openxmlformats.org/markup-compatibility/2006" xmlns:a14="http://schemas.microsoft.com/office/drawing/2010/main">
+        <mc:Choice Requires="a14">
           <p:sp>
             <p:nvSpPr>
               <p:cNvPr id="179" name="文本框 178">
@@ -30665,7 +30665,7 @@
             </p:txBody>
           </p:sp>
         </mc:Choice>
-        <mc:Fallback>
+        <mc:Fallback xmlns="">
           <p:sp>
             <p:nvSpPr>
               <p:cNvPr id="179" name="文本框 178">
@@ -31010,8 +31010,8 @@
           </a:p>
         </p:txBody>
       </p:sp>
-      <mc:AlternateContent xmlns:mc="http://schemas.openxmlformats.org/markup-compatibility/2006">
-        <mc:Choice xmlns:a14="http://schemas.microsoft.com/office/drawing/2010/main" Requires="a14">
+      <mc:AlternateContent xmlns:mc="http://schemas.openxmlformats.org/markup-compatibility/2006" xmlns:a14="http://schemas.microsoft.com/office/drawing/2010/main">
+        <mc:Choice Requires="a14">
           <p:sp>
             <p:nvSpPr>
               <p:cNvPr id="311" name="文本框 310">
@@ -31061,7 +31061,7 @@
             </p:txBody>
           </p:sp>
         </mc:Choice>
-        <mc:Fallback>
+        <mc:Fallback xmlns="">
           <p:sp>
             <p:nvSpPr>
               <p:cNvPr id="311" name="文本框 310">
@@ -31192,8 +31192,8 @@
           </a:fontRef>
         </p:style>
       </p:cxnSp>
-      <mc:AlternateContent xmlns:mc="http://schemas.openxmlformats.org/markup-compatibility/2006">
-        <mc:Choice xmlns:a14="http://schemas.microsoft.com/office/drawing/2010/main" Requires="a14">
+      <mc:AlternateContent xmlns:mc="http://schemas.openxmlformats.org/markup-compatibility/2006" xmlns:a14="http://schemas.microsoft.com/office/drawing/2010/main">
+        <mc:Choice Requires="a14">
           <p:sp>
             <p:nvSpPr>
               <p:cNvPr id="330" name="文本框 329">
@@ -31241,14 +31241,7 @@
                           <a:latin typeface="Cambria Math" panose="02040503050406030204" pitchFamily="18" charset="0"/>
                           <a:ea typeface="Cambria Math" panose="02040503050406030204" pitchFamily="18" charset="0"/>
                         </a:rPr>
-                        <m:t>1</m:t>
-                      </m:r>
-                      <m:r>
-                        <a:rPr lang="en-US" altLang="zh-CN" sz="1200" b="1" i="1">
-                          <a:latin typeface="Cambria Math" panose="02040503050406030204" pitchFamily="18" charset="0"/>
-                          <a:ea typeface="Cambria Math" panose="02040503050406030204" pitchFamily="18" charset="0"/>
-                        </a:rPr>
-                        <m:t>×</m:t>
+                        <m:t>1×</m:t>
                       </m:r>
                       <m:r>
                         <a:rPr lang="en-US" altLang="zh-CN" sz="1200" b="1" i="1" smtClean="0">
@@ -31297,14 +31290,7 @@
                           <a:latin typeface="Cambria Math" panose="02040503050406030204" pitchFamily="18" charset="0"/>
                           <a:ea typeface="Cambria Math" panose="02040503050406030204" pitchFamily="18" charset="0"/>
                         </a:rPr>
-                        <m:t>1</m:t>
-                      </m:r>
-                      <m:r>
-                        <a:rPr lang="en-US" altLang="zh-CN" sz="1200" b="1" i="1" smtClean="0">
-                          <a:latin typeface="Cambria Math" panose="02040503050406030204" pitchFamily="18" charset="0"/>
-                          <a:ea typeface="Cambria Math" panose="02040503050406030204" pitchFamily="18" charset="0"/>
-                        </a:rPr>
-                        <m:t>)</m:t>
+                        <m:t>1)</m:t>
                       </m:r>
                     </m:oMath>
                   </m:oMathPara>
@@ -31314,7 +31300,7 @@
             </p:txBody>
           </p:sp>
         </mc:Choice>
-        <mc:Fallback>
+        <mc:Fallback xmlns="">
           <p:sp>
             <p:nvSpPr>
               <p:cNvPr id="330" name="文本框 329">
@@ -31491,8 +31477,8 @@
           </a:p>
         </p:txBody>
       </p:sp>
-      <mc:AlternateContent xmlns:mc="http://schemas.openxmlformats.org/markup-compatibility/2006">
-        <mc:Choice xmlns:a14="http://schemas.microsoft.com/office/drawing/2010/main" Requires="a14">
+      <mc:AlternateContent xmlns:mc="http://schemas.openxmlformats.org/markup-compatibility/2006" xmlns:a14="http://schemas.microsoft.com/office/drawing/2010/main">
+        <mc:Choice Requires="a14">
           <p:sp>
             <p:nvSpPr>
               <p:cNvPr id="348" name="文本框 347">
@@ -31613,7 +31599,7 @@
             </p:txBody>
           </p:sp>
         </mc:Choice>
-        <mc:Fallback>
+        <mc:Fallback xmlns="">
           <p:sp>
             <p:nvSpPr>
               <p:cNvPr id="348" name="文本框 347">
@@ -31715,8 +31701,8 @@
           </a:p>
         </p:txBody>
       </p:sp>
-      <mc:AlternateContent xmlns:mc="http://schemas.openxmlformats.org/markup-compatibility/2006">
-        <mc:Choice xmlns:a14="http://schemas.microsoft.com/office/drawing/2010/main" Requires="a14">
+      <mc:AlternateContent xmlns:mc="http://schemas.openxmlformats.org/markup-compatibility/2006" xmlns:a14="http://schemas.microsoft.com/office/drawing/2010/main">
+        <mc:Choice Requires="a14">
           <p:sp>
             <p:nvSpPr>
               <p:cNvPr id="350" name="文本框 349">
@@ -31788,7 +31774,7 @@
             </p:txBody>
           </p:sp>
         </mc:Choice>
-        <mc:Fallback>
+        <mc:Fallback xmlns="">
           <p:sp>
             <p:nvSpPr>
               <p:cNvPr id="350" name="文本框 349">
